--- a/2025_Б_ККП_ПЗПІ-22-4_Герцев_В_А/2025_Б_ККП_ПЗПІ-22-4_Герцев_В_А.pptx
+++ b/2025_Б_ККП_ПЗПІ-22-4_Герцев_В_А/2025_Б_ККП_ПЗПІ-22-4_Герцев_В_А.pptx
@@ -8430,7 +8430,7 @@
         <p:spPr>
           <a:xfrm>
             <a:off x="311700" y="1225225"/>
-            <a:ext cx="8520600" cy="3354000"/>
+            <a:ext cx="8520600" cy="3037213"/>
           </a:xfrm>
           <a:prstGeom prst="rect">
             <a:avLst/>
@@ -8438,7 +8438,7 @@
         </p:spPr>
         <p:txBody>
           <a:bodyPr spcFirstLastPara="1" wrap="square" lIns="91425" tIns="91425" rIns="91425" bIns="91425" anchor="t" anchorCtr="0">
-            <a:normAutofit/>
+            <a:normAutofit fontScale="77500" lnSpcReduction="20000"/>
           </a:bodyPr>
           <a:lstStyle/>
           <a:p>
@@ -8594,6 +8594,35 @@
               <a:rPr lang="uk-UA" dirty="0"/>
               <a:t>інтеграція монетизації (реклама, покупки).</a:t>
             </a:r>
+          </a:p>
+          <a:p>
+            <a:pPr marL="457200" lvl="1" indent="0">
+              <a:buNone/>
+            </a:pPr>
+            <a:endParaRPr lang="uk-UA" dirty="0"/>
+          </a:p>
+          <a:p>
+            <a:pPr marL="457200" lvl="1" indent="0">
+              <a:buNone/>
+            </a:pPr>
+            <a:r>
+              <a:rPr lang="en-US" dirty="0" err="1"/>
+              <a:t>Github</a:t>
+            </a:r>
+            <a:r>
+              <a:rPr lang="en-US" dirty="0"/>
+              <a:t>:</a:t>
+            </a:r>
+          </a:p>
+          <a:p>
+            <a:pPr marL="457200" lvl="1" indent="0">
+              <a:buNone/>
+            </a:pPr>
+            <a:r>
+              <a:rPr lang="en-US" dirty="0"/>
+              <a:t>https://github.com/NureHertsevViacheslav/CCP/blob/4e4630410179acff2384cfb076589b14a0d3f8ae/2025_%D0%91_%D0%9A%D0%9A%D0%9F_%D0%9F%D0%97%D0%9F%D0%86-22-4_%D0%93%D0%B5%D1%80%D1%86%D0%B5%D0%B2_%D0%92_%D0%90/2025_%D0%91_%D0%9A%D0%9A%D0%9F_%D0%9F%D0%97%D0%9F%D0%86-22-4_%D0%93%D0%B5%D1%80%D1%86%D0%B5%D0%B2_%D0%92_%D0%90.rar</a:t>
+            </a:r>
+            <a:endParaRPr lang="uk-UA" dirty="0"/>
           </a:p>
         </p:txBody>
       </p:sp>
